--- a/media/resources/files/Onduktar_Koshuu_Kemituu_XO.pptx
+++ b/media/resources/files/Onduktar_Koshuu_Kemituu_XO.pptx
@@ -8465,7 +8465,7 @@
                 <a:ea typeface="+mn-ea"/>
                 <a:cs typeface="+mn-cs"/>
               </a:rPr>
-              <a:t>Турдуу пикирлер учун ыраазычылык билдиребиз.</a:t>
+              <a:t>Түрдүү пикирлер үчүн ыраазычылык билдиребиз.</a:t>
             </a:r>
           </a:p>
           <a:p>

--- a/media/resources/files/Onduktar_Koshuu_Kemituu_XO.pptx
+++ b/media/resources/files/Onduktar_Koshuu_Kemituu_XO.pptx
@@ -3864,7 +3864,7 @@
                 <a:ea typeface="+mn-ea"/>
                 <a:cs typeface="Arial" panose="020B0604020202020204" pitchFamily="34" charset="0"/>
               </a:rPr>
-              <a:t>Мугалим үчүн жооп баракчасы жана таратма материалдар камтылган.</a:t>
+              <a:t>Мугалим үчүн жооп барагы жана таратма материалдар бар.</a:t>
             </a:r>
           </a:p>
           <a:p>
@@ -3933,7 +3933,7 @@
                 <a:ea typeface="+mn-ea"/>
                 <a:cs typeface="Arial" panose="020B0604020202020204" pitchFamily="34" charset="0"/>
               </a:rPr>
-              <a:t>Кайсы команда туура жооп бергенине жараша '</a:t>
+              <a:t>Туура жооп берген командага жараша «</a:t>
             </a:r>
             <a:r>
               <a:rPr kumimoji="0" lang="en-GB" sz="2000" b="0" i="0" u="sng" strike="noStrike" kern="1200" cap="none" spc="0" normalizeH="0" baseline="0" noProof="0" dirty="0">
@@ -3950,7 +3950,7 @@
                 <a:ea typeface="+mn-ea"/>
                 <a:cs typeface="Arial" panose="020B0604020202020204" pitchFamily="34" charset="0"/>
               </a:rPr>
-              <a:t>X' </a:t>
+              <a:t>X» </a:t>
             </a:r>
             <a:r>
               <a:rPr kumimoji="0" lang="ru-RU" sz="2000" b="0" i="0" u="sng" strike="noStrike" kern="1200" cap="none" spc="0" normalizeH="0" baseline="0" noProof="0" dirty="0">
@@ -3967,7 +3967,7 @@
                 <a:ea typeface="+mn-ea"/>
                 <a:cs typeface="Arial" panose="020B0604020202020204" pitchFamily="34" charset="0"/>
               </a:rPr>
-              <a:t>же '</a:t>
+              <a:t>же «</a:t>
             </a:r>
             <a:r>
               <a:rPr kumimoji="0" lang="en-GB" sz="2000" b="0" i="0" u="sng" strike="noStrike" kern="1200" cap="none" spc="0" normalizeH="0" baseline="0" noProof="0" dirty="0">
@@ -3984,7 +3984,7 @@
                 <a:ea typeface="+mn-ea"/>
                 <a:cs typeface="Arial" panose="020B0604020202020204" pitchFamily="34" charset="0"/>
               </a:rPr>
-              <a:t>O' </a:t>
+              <a:t>O» </a:t>
             </a:r>
             <a:r>
               <a:rPr kumimoji="0" lang="ru-RU" sz="2000" b="0" i="0" u="sng" strike="noStrike" kern="1200" cap="none" spc="0" normalizeH="0" baseline="0" noProof="0" dirty="0">
@@ -4001,7 +4001,7 @@
                 <a:ea typeface="+mn-ea"/>
                 <a:cs typeface="Arial" panose="020B0604020202020204" pitchFamily="34" charset="0"/>
               </a:rPr>
-              <a:t>баскычын басыңыз/тийип коюңуз</a:t>
+              <a:t>баскычын басыңыз</a:t>
             </a:r>
             <a:r>
               <a:rPr kumimoji="0" lang="en-GB" sz="2000" b="0" i="0" u="none" strike="noStrike" kern="1200" cap="none" spc="0" normalizeH="0" baseline="0" noProof="0" dirty="0">
@@ -4618,7 +4618,7 @@
             <a:pPr algn="ctr"/>
             <a:r>
               <a:rPr lang="en-GB" sz="3600" dirty="0"/>
-              <a:t>0.7 + 8</a:t>
+              <a:t>0,7 + 8</a:t>
             </a:r>
           </a:p>
         </p:txBody>
@@ -4659,7 +4659,7 @@
             <a:pPr algn="ctr"/>
             <a:r>
               <a:rPr lang="en-GB" sz="3600" dirty="0"/>
-              <a:t>6.4 − 0.8</a:t>
+              <a:t>6,4 − 0,8</a:t>
             </a:r>
           </a:p>
         </p:txBody>
@@ -4700,7 +4700,7 @@
             <a:pPr algn="ctr"/>
             <a:r>
               <a:rPr lang="en-GB" sz="3600" dirty="0"/>
-              <a:t>0.4 + 2.5</a:t>
+              <a:t>0,4 + 2,5</a:t>
             </a:r>
           </a:p>
         </p:txBody>
@@ -4741,7 +4741,7 @@
             <a:pPr algn="ctr"/>
             <a:r>
               <a:rPr lang="en-GB" sz="3600" dirty="0"/>
-              <a:t>4.8 + 6.3</a:t>
+              <a:t>4,8 + 6,3</a:t>
             </a:r>
           </a:p>
         </p:txBody>
@@ -4782,7 +4782,7 @@
             <a:pPr algn="ctr"/>
             <a:r>
               <a:rPr lang="en-GB" sz="3600" dirty="0"/>
-              <a:t>4.4 − 2.6 + 0.9</a:t>
+              <a:t>4,4 − 2,6 + 0,9</a:t>
             </a:r>
           </a:p>
         </p:txBody>
@@ -4823,7 +4823,7 @@
             <a:pPr algn="ctr"/>
             <a:r>
               <a:rPr lang="en-GB" sz="3600" dirty="0"/>
-              <a:t>1.7 + 4.5</a:t>
+              <a:t>1,7 + 4,5</a:t>
             </a:r>
           </a:p>
         </p:txBody>
@@ -4864,7 +4864,7 @@
             <a:pPr algn="ctr"/>
             <a:r>
               <a:rPr lang="en-GB" sz="3600" dirty="0"/>
-              <a:t>8.8 − 6</a:t>
+              <a:t>8,8 − 6</a:t>
             </a:r>
           </a:p>
         </p:txBody>
@@ -4905,7 +4905,7 @@
             <a:pPr algn="ctr"/>
             <a:r>
               <a:rPr lang="en-GB" sz="3600" dirty="0"/>
-              <a:t>0.91 − 0.5</a:t>
+              <a:t>0,91 − 0,5</a:t>
             </a:r>
           </a:p>
         </p:txBody>
@@ -4946,7 +4946,7 @@
             <a:pPr algn="ctr"/>
             <a:r>
               <a:rPr lang="en-GB" sz="3600" dirty="0"/>
-              <a:t>7 − 2.8</a:t>
+              <a:t>7 − 2,8</a:t>
             </a:r>
           </a:p>
         </p:txBody>
